--- a/m9/diapositivos/sessao-07-m9-f07.pptx
+++ b/m9/diapositivos/sessao-07-m9-f07.pptx
@@ -1199,7 +1199,41 @@
                 <a:ea typeface="Georgia" pitchFamily="34" charset="-122"/>
                 <a:cs typeface="Georgia" pitchFamily="34" charset="-120"/>
               </a:rPr>
-              <a:t>O último teste junta o Memorial a tudo o que leste desde o 1.º ano. Vais escolher as pontes antes de elas te escolherem a ti.</a:t>
+              <a:t>O último teste junta o </a:t>
+            </a:r>
+            <a:pPr indent="0" marL="0">
+              <a:lnSpc>
+                <a:spcPct val="115000"/>
+              </a:lnSpc>
+              <a:buNone/>
+            </a:pPr>
+            <a:r>
+              <a:rPr lang="en-US" sz="1800" i="1" dirty="0">
+                <a:solidFill>
+                  <a:srgbClr val="F2F0EA"/>
+                </a:solidFill>
+                <a:latin typeface="Georgia" pitchFamily="34" charset="0"/>
+                <a:ea typeface="Georgia" pitchFamily="34" charset="-122"/>
+                <a:cs typeface="Georgia" pitchFamily="34" charset="-120"/>
+              </a:rPr>
+              <a:t>Memorial</a:t>
+            </a:r>
+            <a:pPr indent="0" marL="0">
+              <a:lnSpc>
+                <a:spcPct val="115000"/>
+              </a:lnSpc>
+              <a:buNone/>
+            </a:pPr>
+            <a:r>
+              <a:rPr lang="en-US" sz="1800" i="1" dirty="0">
+                <a:solidFill>
+                  <a:srgbClr val="F2F0EA"/>
+                </a:solidFill>
+                <a:latin typeface="Georgia" pitchFamily="34" charset="0"/>
+                <a:ea typeface="Georgia" pitchFamily="34" charset="-122"/>
+                <a:cs typeface="Georgia" pitchFamily="34" charset="-120"/>
+              </a:rPr>
+              <a:t> a tudo o que leste desde o 1.º ano. Vais escolher as pontes antes de elas te escolherem a ti.</a:t>
             </a:r>
             <a:endParaRPr lang="en-US" sz="1800" dirty="0"/>
           </a:p>
@@ -1971,7 +2005,41 @@
                 <a:ea typeface="Arial" pitchFamily="34" charset="-122"/>
                 <a:cs typeface="Arial" pitchFamily="34" charset="-120"/>
               </a:rPr>
-              <a:t>O último teste junta o Memorial do Convento a um tema de um módulo dos três anos e à gramática, e esta lição prepara-o.</a:t>
+              <a:t>O último teste junta o </a:t>
+            </a:r>
+            <a:pPr indent="0" marL="0">
+              <a:lnSpc>
+                <a:spcPct val="105000"/>
+              </a:lnSpc>
+              <a:buNone/>
+            </a:pPr>
+            <a:r>
+              <a:rPr lang="en-US" sz="2200" i="1" dirty="0">
+                <a:solidFill>
+                  <a:srgbClr val="F2F0EA"/>
+                </a:solidFill>
+                <a:latin typeface="Arial" pitchFamily="34" charset="0"/>
+                <a:ea typeface="Arial" pitchFamily="34" charset="-122"/>
+                <a:cs typeface="Arial" pitchFamily="34" charset="-120"/>
+              </a:rPr>
+              <a:t>Memorial do Convento</a:t>
+            </a:r>
+            <a:pPr indent="0" marL="0">
+              <a:lnSpc>
+                <a:spcPct val="105000"/>
+              </a:lnSpc>
+              <a:buNone/>
+            </a:pPr>
+            <a:r>
+              <a:rPr lang="en-US" sz="2200" dirty="0">
+                <a:solidFill>
+                  <a:srgbClr val="F2F0EA"/>
+                </a:solidFill>
+                <a:latin typeface="Arial" pitchFamily="34" charset="0"/>
+                <a:ea typeface="Arial" pitchFamily="34" charset="-122"/>
+                <a:cs typeface="Arial" pitchFamily="34" charset="-120"/>
+              </a:rPr>
+              <a:t> a um tema de um módulo dos três anos e à gramática, e esta lição prepara-o.</a:t>
             </a:r>
             <a:endParaRPr lang="en-US" sz="2200" dirty="0"/>
           </a:p>
@@ -2564,7 +2632,21 @@
                           <a:ea typeface="Arial" pitchFamily="34" charset="-122"/>
                           <a:cs typeface="Arial" pitchFamily="34" charset="-120"/>
                         </a:rPr>
-                        <a:t>NO MEMORIAL</a:t>
+                        <a:t>NO </a:t>
+                      </a:r>
+                      <a:pPr indent="0" marL="0">
+                        <a:buNone/>
+                      </a:pPr>
+                      <a:r>
+                        <a:rPr lang="en-US" sz="1100" b="1" i="1" spc="150" kern="0" dirty="0">
+                          <a:solidFill>
+                            <a:srgbClr val="A9A79F"/>
+                          </a:solidFill>
+                          <a:latin typeface="Arial" pitchFamily="34" charset="0"/>
+                          <a:ea typeface="Arial" pitchFamily="34" charset="-122"/>
+                          <a:cs typeface="Arial" pitchFamily="34" charset="-120"/>
+                        </a:rPr>
+                        <a:t>MEMORIAL</a:t>
                       </a:r>
                       <a:endParaRPr lang="en-US" sz="1100" dirty="0">
                         <a:latin typeface="Arial" charset="0"/>
@@ -5239,7 +5321,109 @@
                 <a:ea typeface="Arial" pitchFamily="34" charset="-122"/>
                 <a:cs typeface="Arial" pitchFamily="34" charset="-120"/>
               </a:rPr>
-              <a:t>Os itens percorreram as cinco pontes do quadro: povo, poder, amor, sonho e história, do Memorial a Fernão Lopes, Vieira, Amor de Perdição, Pessoa e Os Lusíadas.</a:t>
+              <a:t>Os itens percorreram as cinco pontes do quadro: povo, poder, amor, sonho e história, do </a:t>
+            </a:r>
+            <a:pPr indent="0" marL="0">
+              <a:lnSpc>
+                <a:spcPct val="105000"/>
+              </a:lnSpc>
+              <a:buNone/>
+            </a:pPr>
+            <a:r>
+              <a:rPr lang="en-US" sz="2200" i="1" dirty="0">
+                <a:solidFill>
+                  <a:srgbClr val="F2F0EA"/>
+                </a:solidFill>
+                <a:latin typeface="Arial" pitchFamily="34" charset="0"/>
+                <a:ea typeface="Arial" pitchFamily="34" charset="-122"/>
+                <a:cs typeface="Arial" pitchFamily="34" charset="-120"/>
+              </a:rPr>
+              <a:t>Memorial</a:t>
+            </a:r>
+            <a:pPr indent="0" marL="0">
+              <a:lnSpc>
+                <a:spcPct val="105000"/>
+              </a:lnSpc>
+              <a:buNone/>
+            </a:pPr>
+            <a:r>
+              <a:rPr lang="en-US" sz="2200" dirty="0">
+                <a:solidFill>
+                  <a:srgbClr val="F2F0EA"/>
+                </a:solidFill>
+                <a:latin typeface="Arial" pitchFamily="34" charset="0"/>
+                <a:ea typeface="Arial" pitchFamily="34" charset="-122"/>
+                <a:cs typeface="Arial" pitchFamily="34" charset="-120"/>
+              </a:rPr>
+              <a:t> a Fernão Lopes, Vieira, </a:t>
+            </a:r>
+            <a:pPr indent="0" marL="0">
+              <a:lnSpc>
+                <a:spcPct val="105000"/>
+              </a:lnSpc>
+              <a:buNone/>
+            </a:pPr>
+            <a:r>
+              <a:rPr lang="en-US" sz="2200" i="1" dirty="0">
+                <a:solidFill>
+                  <a:srgbClr val="F2F0EA"/>
+                </a:solidFill>
+                <a:latin typeface="Arial" pitchFamily="34" charset="0"/>
+                <a:ea typeface="Arial" pitchFamily="34" charset="-122"/>
+                <a:cs typeface="Arial" pitchFamily="34" charset="-120"/>
+              </a:rPr>
+              <a:t>Amor de Perdição</a:t>
+            </a:r>
+            <a:pPr indent="0" marL="0">
+              <a:lnSpc>
+                <a:spcPct val="105000"/>
+              </a:lnSpc>
+              <a:buNone/>
+            </a:pPr>
+            <a:r>
+              <a:rPr lang="en-US" sz="2200" dirty="0">
+                <a:solidFill>
+                  <a:srgbClr val="F2F0EA"/>
+                </a:solidFill>
+                <a:latin typeface="Arial" pitchFamily="34" charset="0"/>
+                <a:ea typeface="Arial" pitchFamily="34" charset="-122"/>
+                <a:cs typeface="Arial" pitchFamily="34" charset="-120"/>
+              </a:rPr>
+              <a:t>, Pessoa e </a:t>
+            </a:r>
+            <a:pPr indent="0" marL="0">
+              <a:lnSpc>
+                <a:spcPct val="105000"/>
+              </a:lnSpc>
+              <a:buNone/>
+            </a:pPr>
+            <a:r>
+              <a:rPr lang="en-US" sz="2200" i="1" dirty="0">
+                <a:solidFill>
+                  <a:srgbClr val="F2F0EA"/>
+                </a:solidFill>
+                <a:latin typeface="Arial" pitchFamily="34" charset="0"/>
+                <a:ea typeface="Arial" pitchFamily="34" charset="-122"/>
+                <a:cs typeface="Arial" pitchFamily="34" charset="-120"/>
+              </a:rPr>
+              <a:t>Os Lusíadas</a:t>
+            </a:r>
+            <a:pPr indent="0" marL="0">
+              <a:lnSpc>
+                <a:spcPct val="105000"/>
+              </a:lnSpc>
+              <a:buNone/>
+            </a:pPr>
+            <a:r>
+              <a:rPr lang="en-US" sz="2200" dirty="0">
+                <a:solidFill>
+                  <a:srgbClr val="F2F0EA"/>
+                </a:solidFill>
+                <a:latin typeface="Arial" pitchFamily="34" charset="0"/>
+                <a:ea typeface="Arial" pitchFamily="34" charset="-122"/>
+                <a:cs typeface="Arial" pitchFamily="34" charset="-120"/>
+              </a:rPr>
+              <a:t>.</a:t>
             </a:r>
             <a:endParaRPr lang="en-US" sz="2200" dirty="0"/>
           </a:p>
